--- a/figures/datapaper/scratch_routeyearcombo.pptx
+++ b/figures/datapaper/scratch_routeyearcombo.pptx
@@ -6,6 +6,8 @@
   </p:sldMasterIdLst>
   <p:sldIdLst>
     <p:sldId id="256" r:id="rId2"/>
+    <p:sldId id="257" r:id="rId3"/>
+    <p:sldId id="258" r:id="rId4"/>
   </p:sldIdLst>
   <p:sldSz cx="12192000" cy="6858000"/>
   <p:notesSz cx="6858000" cy="9144000"/>
@@ -259,7 +261,7 @@
           <a:p>
             <a:fld id="{E3CAC27E-A09F-42ED-BD9F-2DE2B5FBE76A}" type="datetimeFigureOut">
               <a:rPr lang="en-US" smtClean="0"/>
-              <a:t>2/10/2026</a:t>
+              <a:t>6/2/2026</a:t>
             </a:fld>
             <a:endParaRPr lang="en-US"/>
           </a:p>
@@ -457,7 +459,7 @@
           <a:p>
             <a:fld id="{E3CAC27E-A09F-42ED-BD9F-2DE2B5FBE76A}" type="datetimeFigureOut">
               <a:rPr lang="en-US" smtClean="0"/>
-              <a:t>2/10/2026</a:t>
+              <a:t>6/2/2026</a:t>
             </a:fld>
             <a:endParaRPr lang="en-US"/>
           </a:p>
@@ -665,7 +667,7 @@
           <a:p>
             <a:fld id="{E3CAC27E-A09F-42ED-BD9F-2DE2B5FBE76A}" type="datetimeFigureOut">
               <a:rPr lang="en-US" smtClean="0"/>
-              <a:t>2/10/2026</a:t>
+              <a:t>6/2/2026</a:t>
             </a:fld>
             <a:endParaRPr lang="en-US"/>
           </a:p>
@@ -863,7 +865,7 @@
           <a:p>
             <a:fld id="{E3CAC27E-A09F-42ED-BD9F-2DE2B5FBE76A}" type="datetimeFigureOut">
               <a:rPr lang="en-US" smtClean="0"/>
-              <a:t>2/10/2026</a:t>
+              <a:t>6/2/2026</a:t>
             </a:fld>
             <a:endParaRPr lang="en-US"/>
           </a:p>
@@ -1138,7 +1140,7 @@
           <a:p>
             <a:fld id="{E3CAC27E-A09F-42ED-BD9F-2DE2B5FBE76A}" type="datetimeFigureOut">
               <a:rPr lang="en-US" smtClean="0"/>
-              <a:t>2/10/2026</a:t>
+              <a:t>6/2/2026</a:t>
             </a:fld>
             <a:endParaRPr lang="en-US"/>
           </a:p>
@@ -1403,7 +1405,7 @@
           <a:p>
             <a:fld id="{E3CAC27E-A09F-42ED-BD9F-2DE2B5FBE76A}" type="datetimeFigureOut">
               <a:rPr lang="en-US" smtClean="0"/>
-              <a:t>2/10/2026</a:t>
+              <a:t>6/2/2026</a:t>
             </a:fld>
             <a:endParaRPr lang="en-US"/>
           </a:p>
@@ -1815,7 +1817,7 @@
           <a:p>
             <a:fld id="{E3CAC27E-A09F-42ED-BD9F-2DE2B5FBE76A}" type="datetimeFigureOut">
               <a:rPr lang="en-US" smtClean="0"/>
-              <a:t>2/10/2026</a:t>
+              <a:t>6/2/2026</a:t>
             </a:fld>
             <a:endParaRPr lang="en-US"/>
           </a:p>
@@ -1956,7 +1958,7 @@
           <a:p>
             <a:fld id="{E3CAC27E-A09F-42ED-BD9F-2DE2B5FBE76A}" type="datetimeFigureOut">
               <a:rPr lang="en-US" smtClean="0"/>
-              <a:t>2/10/2026</a:t>
+              <a:t>6/2/2026</a:t>
             </a:fld>
             <a:endParaRPr lang="en-US"/>
           </a:p>
@@ -2069,7 +2071,7 @@
           <a:p>
             <a:fld id="{E3CAC27E-A09F-42ED-BD9F-2DE2B5FBE76A}" type="datetimeFigureOut">
               <a:rPr lang="en-US" smtClean="0"/>
-              <a:t>2/10/2026</a:t>
+              <a:t>6/2/2026</a:t>
             </a:fld>
             <a:endParaRPr lang="en-US"/>
           </a:p>
@@ -2380,7 +2382,7 @@
           <a:p>
             <a:fld id="{E3CAC27E-A09F-42ED-BD9F-2DE2B5FBE76A}" type="datetimeFigureOut">
               <a:rPr lang="en-US" smtClean="0"/>
-              <a:t>2/10/2026</a:t>
+              <a:t>6/2/2026</a:t>
             </a:fld>
             <a:endParaRPr lang="en-US"/>
           </a:p>
@@ -2668,7 +2670,7 @@
           <a:p>
             <a:fld id="{E3CAC27E-A09F-42ED-BD9F-2DE2B5FBE76A}" type="datetimeFigureOut">
               <a:rPr lang="en-US" smtClean="0"/>
-              <a:t>2/10/2026</a:t>
+              <a:t>6/2/2026</a:t>
             </a:fld>
             <a:endParaRPr lang="en-US"/>
           </a:p>
@@ -2909,7 +2911,7 @@
           <a:p>
             <a:fld id="{E3CAC27E-A09F-42ED-BD9F-2DE2B5FBE76A}" type="datetimeFigureOut">
               <a:rPr lang="en-US" smtClean="0"/>
-              <a:t>2/10/2026</a:t>
+              <a:t>6/2/2026</a:t>
             </a:fld>
             <a:endParaRPr lang="en-US"/>
           </a:p>
@@ -3413,6 +3415,462 @@
 </p:sld>
 </file>
 
+<file path=ppt/slides/slide2.xml><?xml version="1.0" encoding="utf-8"?>
+<p:sld xmlns:a="http://schemas.openxmlformats.org/drawingml/2006/main" xmlns:r="http://schemas.openxmlformats.org/officeDocument/2006/relationships" xmlns:p="http://schemas.openxmlformats.org/presentationml/2006/main">
+  <p:cSld>
+    <p:spTree>
+      <p:nvGrpSpPr>
+        <p:cNvPr id="1" name=""/>
+        <p:cNvGrpSpPr/>
+        <p:nvPr/>
+      </p:nvGrpSpPr>
+      <p:grpSpPr>
+        <a:xfrm>
+          <a:off x="0" y="0"/>
+          <a:ext cx="0" cy="0"/>
+          <a:chOff x="0" y="0"/>
+          <a:chExt cx="0" cy="0"/>
+        </a:xfrm>
+      </p:grpSpPr>
+      <p:pic>
+        <p:nvPicPr>
+          <p:cNvPr id="2" name="Picture 1">
+            <a:extLst>
+              <a:ext uri="{FF2B5EF4-FFF2-40B4-BE49-F238E27FC236}">
+                <a16:creationId xmlns:a16="http://schemas.microsoft.com/office/drawing/2014/main" id="{D8968413-F466-57FD-67F2-80B58257210C}"/>
+              </a:ext>
+            </a:extLst>
+          </p:cNvPr>
+          <p:cNvPicPr>
+            <a:picLocks noChangeAspect="1"/>
+          </p:cNvPicPr>
+          <p:nvPr/>
+        </p:nvPicPr>
+        <p:blipFill>
+          <a:blip r:embed="rId2">
+            <a:extLst>
+              <a:ext uri="{28A0092B-C50C-407E-A947-70E740481C1C}">
+                <a14:useLocalDpi xmlns:a14="http://schemas.microsoft.com/office/drawing/2010/main" val="0"/>
+              </a:ext>
+            </a:extLst>
+          </a:blip>
+          <a:srcRect l="2222" b="4276"/>
+          <a:stretch>
+            <a:fillRect/>
+          </a:stretch>
+        </p:blipFill>
+        <p:spPr>
+          <a:xfrm>
+            <a:off x="5268332" y="1374793"/>
+            <a:ext cx="5029201" cy="4832369"/>
+          </a:xfrm>
+          <a:prstGeom prst="rect">
+            <a:avLst/>
+          </a:prstGeom>
+        </p:spPr>
+      </p:pic>
+      <p:pic>
+        <p:nvPicPr>
+          <p:cNvPr id="13" name="Picture 12">
+            <a:extLst>
+              <a:ext uri="{FF2B5EF4-FFF2-40B4-BE49-F238E27FC236}">
+                <a16:creationId xmlns:a16="http://schemas.microsoft.com/office/drawing/2014/main" id="{ED49CCF5-BA0C-63D1-22A2-8BD010389E0A}"/>
+              </a:ext>
+            </a:extLst>
+          </p:cNvPr>
+          <p:cNvPicPr>
+            <a:picLocks noChangeAspect="1"/>
+          </p:cNvPicPr>
+          <p:nvPr/>
+        </p:nvPicPr>
+        <p:blipFill>
+          <a:blip r:embed="rId3">
+            <a:extLst>
+              <a:ext uri="{28A0092B-C50C-407E-A947-70E740481C1C}">
+                <a14:useLocalDpi xmlns:a14="http://schemas.microsoft.com/office/drawing/2010/main" val="0"/>
+              </a:ext>
+            </a:extLst>
+          </a:blip>
+          <a:stretch>
+            <a:fillRect/>
+          </a:stretch>
+        </p:blipFill>
+        <p:spPr>
+          <a:xfrm>
+            <a:off x="5211182" y="1374793"/>
+            <a:ext cx="5143500" cy="5048250"/>
+          </a:xfrm>
+          <a:prstGeom prst="rect">
+            <a:avLst/>
+          </a:prstGeom>
+        </p:spPr>
+      </p:pic>
+      <p:pic>
+        <p:nvPicPr>
+          <p:cNvPr id="3" name="Picture 2">
+            <a:extLst>
+              <a:ext uri="{FF2B5EF4-FFF2-40B4-BE49-F238E27FC236}">
+                <a16:creationId xmlns:a16="http://schemas.microsoft.com/office/drawing/2014/main" id="{BD4B2338-5A8C-5E76-7DF8-4F48845E01DA}"/>
+              </a:ext>
+            </a:extLst>
+          </p:cNvPr>
+          <p:cNvPicPr>
+            <a:picLocks noChangeAspect="1"/>
+          </p:cNvPicPr>
+          <p:nvPr/>
+        </p:nvPicPr>
+        <p:blipFill>
+          <a:blip r:embed="rId4">
+            <a:extLst>
+              <a:ext uri="{28A0092B-C50C-407E-A947-70E740481C1C}">
+                <a14:useLocalDpi xmlns:a14="http://schemas.microsoft.com/office/drawing/2010/main" val="0"/>
+              </a:ext>
+            </a:extLst>
+          </a:blip>
+          <a:srcRect l="10755" t="10862" r="68868" b="73289"/>
+          <a:stretch>
+            <a:fillRect/>
+          </a:stretch>
+        </p:blipFill>
+        <p:spPr>
+          <a:xfrm>
+            <a:off x="4229100" y="1643743"/>
+            <a:ext cx="1028700" cy="800100"/>
+          </a:xfrm>
+          <a:prstGeom prst="rect">
+            <a:avLst/>
+          </a:prstGeom>
+        </p:spPr>
+      </p:pic>
+      <p:pic>
+        <p:nvPicPr>
+          <p:cNvPr id="15" name="Picture 14">
+            <a:extLst>
+              <a:ext uri="{FF2B5EF4-FFF2-40B4-BE49-F238E27FC236}">
+                <a16:creationId xmlns:a16="http://schemas.microsoft.com/office/drawing/2014/main" id="{163768FB-D202-05A6-0ECB-D6843DCEDE63}"/>
+              </a:ext>
+            </a:extLst>
+          </p:cNvPr>
+          <p:cNvPicPr>
+            <a:picLocks noChangeAspect="1"/>
+          </p:cNvPicPr>
+          <p:nvPr/>
+        </p:nvPicPr>
+        <p:blipFill>
+          <a:blip r:embed="rId5">
+            <a:extLst>
+              <a:ext uri="{28A0092B-C50C-407E-A947-70E740481C1C}">
+                <a14:useLocalDpi xmlns:a14="http://schemas.microsoft.com/office/drawing/2010/main" val="0"/>
+              </a:ext>
+            </a:extLst>
+          </a:blip>
+          <a:srcRect l="9547" t="10360" r="66395" b="76264"/>
+          <a:stretch>
+            <a:fillRect/>
+          </a:stretch>
+        </p:blipFill>
+        <p:spPr>
+          <a:xfrm>
+            <a:off x="3996690" y="1643743"/>
+            <a:ext cx="1214492" cy="675258"/>
+          </a:xfrm>
+          <a:prstGeom prst="rect">
+            <a:avLst/>
+          </a:prstGeom>
+        </p:spPr>
+      </p:pic>
+      <p:pic>
+        <p:nvPicPr>
+          <p:cNvPr id="17" name="Picture 16">
+            <a:extLst>
+              <a:ext uri="{FF2B5EF4-FFF2-40B4-BE49-F238E27FC236}">
+                <a16:creationId xmlns:a16="http://schemas.microsoft.com/office/drawing/2014/main" id="{9329D204-D917-5EF4-1505-98BF97397791}"/>
+              </a:ext>
+            </a:extLst>
+          </p:cNvPr>
+          <p:cNvPicPr>
+            <a:picLocks noChangeAspect="1"/>
+          </p:cNvPicPr>
+          <p:nvPr/>
+        </p:nvPicPr>
+        <p:blipFill>
+          <a:blip r:embed="rId6">
+            <a:extLst>
+              <a:ext uri="{28A0092B-C50C-407E-A947-70E740481C1C}">
+                <a14:useLocalDpi xmlns:a14="http://schemas.microsoft.com/office/drawing/2010/main" val="0"/>
+              </a:ext>
+            </a:extLst>
+          </a:blip>
+          <a:srcRect l="8415" t="9308" r="62679" b="67208"/>
+          <a:stretch>
+            <a:fillRect/>
+          </a:stretch>
+        </p:blipFill>
+        <p:spPr>
+          <a:xfrm>
+            <a:off x="3832411" y="1643743"/>
+            <a:ext cx="1459230" cy="1185527"/>
+          </a:xfrm>
+          <a:prstGeom prst="rect">
+            <a:avLst/>
+          </a:prstGeom>
+        </p:spPr>
+      </p:pic>
+    </p:spTree>
+    <p:extLst>
+      <p:ext uri="{BB962C8B-B14F-4D97-AF65-F5344CB8AC3E}">
+        <p14:creationId xmlns:p14="http://schemas.microsoft.com/office/powerpoint/2010/main" val="1832604631"/>
+      </p:ext>
+    </p:extLst>
+  </p:cSld>
+  <p:clrMapOvr>
+    <a:masterClrMapping/>
+  </p:clrMapOvr>
+</p:sld>
+</file>
+
+<file path=ppt/slides/slide3.xml><?xml version="1.0" encoding="utf-8"?>
+<p:sld xmlns:a="http://schemas.openxmlformats.org/drawingml/2006/main" xmlns:r="http://schemas.openxmlformats.org/officeDocument/2006/relationships" xmlns:p="http://schemas.openxmlformats.org/presentationml/2006/main">
+  <p:cSld>
+    <p:spTree>
+      <p:nvGrpSpPr>
+        <p:cNvPr id="1" name=""/>
+        <p:cNvGrpSpPr/>
+        <p:nvPr/>
+      </p:nvGrpSpPr>
+      <p:grpSpPr>
+        <a:xfrm>
+          <a:off x="0" y="0"/>
+          <a:ext cx="0" cy="0"/>
+          <a:chOff x="0" y="0"/>
+          <a:chExt cx="0" cy="0"/>
+        </a:xfrm>
+      </p:grpSpPr>
+      <p:pic>
+        <p:nvPicPr>
+          <p:cNvPr id="3" name="Picture 2">
+            <a:extLst>
+              <a:ext uri="{FF2B5EF4-FFF2-40B4-BE49-F238E27FC236}">
+                <a16:creationId xmlns:a16="http://schemas.microsoft.com/office/drawing/2014/main" id="{C6B29AED-33F6-8862-CA08-D03D27E93F0B}"/>
+              </a:ext>
+            </a:extLst>
+          </p:cNvPr>
+          <p:cNvPicPr>
+            <a:picLocks noChangeAspect="1"/>
+          </p:cNvPicPr>
+          <p:nvPr/>
+        </p:nvPicPr>
+        <p:blipFill>
+          <a:blip r:embed="rId2"/>
+          <a:stretch>
+            <a:fillRect/>
+          </a:stretch>
+        </p:blipFill>
+        <p:spPr>
+          <a:xfrm>
+            <a:off x="2566987" y="800100"/>
+            <a:ext cx="7058025" cy="5257800"/>
+          </a:xfrm>
+          <a:prstGeom prst="rect">
+            <a:avLst/>
+          </a:prstGeom>
+        </p:spPr>
+      </p:pic>
+      <p:cxnSp>
+        <p:nvCxnSpPr>
+          <p:cNvPr id="5" name="Straight Connector 4">
+            <a:extLst>
+              <a:ext uri="{FF2B5EF4-FFF2-40B4-BE49-F238E27FC236}">
+                <a16:creationId xmlns:a16="http://schemas.microsoft.com/office/drawing/2014/main" id="{C366AA85-701F-DD92-AD55-D97127272ACD}"/>
+              </a:ext>
+            </a:extLst>
+          </p:cNvPr>
+          <p:cNvCxnSpPr>
+            <a:cxnSpLocks/>
+          </p:cNvCxnSpPr>
+          <p:nvPr/>
+        </p:nvCxnSpPr>
+        <p:spPr>
+          <a:xfrm>
+            <a:off x="4314825" y="1162050"/>
+            <a:ext cx="3543300" cy="0"/>
+          </a:xfrm>
+          <a:prstGeom prst="line">
+            <a:avLst/>
+          </a:prstGeom>
+          <a:ln w="9525"/>
+        </p:spPr>
+        <p:style>
+          <a:lnRef idx="2">
+            <a:schemeClr val="dk1"/>
+          </a:lnRef>
+          <a:fillRef idx="0">
+            <a:schemeClr val="dk1"/>
+          </a:fillRef>
+          <a:effectRef idx="1">
+            <a:schemeClr val="dk1"/>
+          </a:effectRef>
+          <a:fontRef idx="minor">
+            <a:schemeClr val="tx1"/>
+          </a:fontRef>
+        </p:style>
+      </p:cxnSp>
+      <p:cxnSp>
+        <p:nvCxnSpPr>
+          <p:cNvPr id="6" name="Straight Connector 5">
+            <a:extLst>
+              <a:ext uri="{FF2B5EF4-FFF2-40B4-BE49-F238E27FC236}">
+                <a16:creationId xmlns:a16="http://schemas.microsoft.com/office/drawing/2014/main" id="{6C92EFB3-481B-1D0E-7F2E-B3B66810FA9E}"/>
+              </a:ext>
+            </a:extLst>
+          </p:cNvPr>
+          <p:cNvCxnSpPr>
+            <a:cxnSpLocks/>
+          </p:cNvCxnSpPr>
+          <p:nvPr/>
+        </p:nvCxnSpPr>
+        <p:spPr>
+          <a:xfrm>
+            <a:off x="7858125" y="1162050"/>
+            <a:ext cx="0" cy="4524375"/>
+          </a:xfrm>
+          <a:prstGeom prst="line">
+            <a:avLst/>
+          </a:prstGeom>
+          <a:ln w="9525"/>
+        </p:spPr>
+        <p:style>
+          <a:lnRef idx="2">
+            <a:schemeClr val="dk1"/>
+          </a:lnRef>
+          <a:fillRef idx="0">
+            <a:schemeClr val="dk1"/>
+          </a:fillRef>
+          <a:effectRef idx="1">
+            <a:schemeClr val="dk1"/>
+          </a:effectRef>
+          <a:fontRef idx="minor">
+            <a:schemeClr val="tx1"/>
+          </a:fontRef>
+        </p:style>
+      </p:cxnSp>
+      <p:sp>
+        <p:nvSpPr>
+          <p:cNvPr id="10" name="Rectangle 9">
+            <a:extLst>
+              <a:ext uri="{FF2B5EF4-FFF2-40B4-BE49-F238E27FC236}">
+                <a16:creationId xmlns:a16="http://schemas.microsoft.com/office/drawing/2014/main" id="{0E69D264-4C7E-1477-B520-9937B2A464A1}"/>
+              </a:ext>
+            </a:extLst>
+          </p:cNvPr>
+          <p:cNvSpPr/>
+          <p:nvPr/>
+        </p:nvSpPr>
+        <p:spPr>
+          <a:xfrm>
+            <a:off x="3676650" y="5695950"/>
+            <a:ext cx="628650" cy="371470"/>
+          </a:xfrm>
+          <a:prstGeom prst="rect">
+            <a:avLst/>
+          </a:prstGeom>
+          <a:solidFill>
+            <a:schemeClr val="bg1"/>
+          </a:solidFill>
+          <a:ln>
+            <a:solidFill>
+              <a:schemeClr val="bg1"/>
+            </a:solidFill>
+          </a:ln>
+        </p:spPr>
+        <p:style>
+          <a:lnRef idx="2">
+            <a:schemeClr val="accent6"/>
+          </a:lnRef>
+          <a:fillRef idx="1">
+            <a:schemeClr val="lt1"/>
+          </a:fillRef>
+          <a:effectRef idx="0">
+            <a:schemeClr val="accent6"/>
+          </a:effectRef>
+          <a:fontRef idx="minor">
+            <a:schemeClr val="dk1"/>
+          </a:fontRef>
+        </p:style>
+        <p:txBody>
+          <a:bodyPr rtlCol="0" anchor="ctr"/>
+          <a:lstStyle/>
+          <a:p>
+            <a:pPr algn="ctr"/>
+            <a:endParaRPr lang="en-US"/>
+          </a:p>
+        </p:txBody>
+      </p:sp>
+      <p:sp>
+        <p:nvSpPr>
+          <p:cNvPr id="11" name="Rectangle 10">
+            <a:extLst>
+              <a:ext uri="{FF2B5EF4-FFF2-40B4-BE49-F238E27FC236}">
+                <a16:creationId xmlns:a16="http://schemas.microsoft.com/office/drawing/2014/main" id="{9782BB83-9B52-0FD7-F7E1-51BEAE90425F}"/>
+              </a:ext>
+            </a:extLst>
+          </p:cNvPr>
+          <p:cNvSpPr/>
+          <p:nvPr/>
+        </p:nvSpPr>
+        <p:spPr>
+          <a:xfrm>
+            <a:off x="7877176" y="5662610"/>
+            <a:ext cx="828673" cy="371470"/>
+          </a:xfrm>
+          <a:prstGeom prst="rect">
+            <a:avLst/>
+          </a:prstGeom>
+          <a:solidFill>
+            <a:schemeClr val="bg1"/>
+          </a:solidFill>
+          <a:ln>
+            <a:solidFill>
+              <a:schemeClr val="bg1"/>
+            </a:solidFill>
+          </a:ln>
+        </p:spPr>
+        <p:style>
+          <a:lnRef idx="2">
+            <a:schemeClr val="accent6"/>
+          </a:lnRef>
+          <a:fillRef idx="1">
+            <a:schemeClr val="lt1"/>
+          </a:fillRef>
+          <a:effectRef idx="0">
+            <a:schemeClr val="accent6"/>
+          </a:effectRef>
+          <a:fontRef idx="minor">
+            <a:schemeClr val="dk1"/>
+          </a:fontRef>
+        </p:style>
+        <p:txBody>
+          <a:bodyPr rtlCol="0" anchor="ctr"/>
+          <a:lstStyle/>
+          <a:p>
+            <a:pPr algn="ctr"/>
+            <a:endParaRPr lang="en-US"/>
+          </a:p>
+        </p:txBody>
+      </p:sp>
+    </p:spTree>
+    <p:extLst>
+      <p:ext uri="{BB962C8B-B14F-4D97-AF65-F5344CB8AC3E}">
+        <p14:creationId xmlns:p14="http://schemas.microsoft.com/office/powerpoint/2010/main" val="3317801591"/>
+      </p:ext>
+    </p:extLst>
+  </p:cSld>
+  <p:clrMapOvr>
+    <a:masterClrMapping/>
+  </p:clrMapOvr>
+</p:sld>
+</file>
+
 <file path=ppt/theme/theme1.xml><?xml version="1.0" encoding="utf-8"?>
 <a:theme xmlns:a="http://schemas.openxmlformats.org/drawingml/2006/main" name="Office Theme">
   <a:themeElements>

--- a/figures/datapaper/scratch_routeyearcombo.pptx
+++ b/figures/datapaper/scratch_routeyearcombo.pptx
@@ -3858,6 +3858,108 @@
           </a:p>
         </p:txBody>
       </p:sp>
+      <p:grpSp>
+        <p:nvGrpSpPr>
+          <p:cNvPr id="7" name="Group 6">
+            <a:extLst>
+              <a:ext uri="{FF2B5EF4-FFF2-40B4-BE49-F238E27FC236}">
+                <a16:creationId xmlns:a16="http://schemas.microsoft.com/office/drawing/2014/main" id="{C2063921-21DD-0E79-DA5D-308D707FEE3B}"/>
+              </a:ext>
+            </a:extLst>
+          </p:cNvPr>
+          <p:cNvGrpSpPr/>
+          <p:nvPr/>
+        </p:nvGrpSpPr>
+        <p:grpSpPr>
+          <a:xfrm>
+            <a:off x="3631468" y="714102"/>
+            <a:ext cx="1629820" cy="719871"/>
+            <a:chOff x="3762103" y="740229"/>
+            <a:chExt cx="1629820" cy="719871"/>
+          </a:xfrm>
+        </p:grpSpPr>
+        <p:sp>
+          <p:nvSpPr>
+            <p:cNvPr id="4" name="Rectangle 3">
+              <a:extLst>
+                <a:ext uri="{FF2B5EF4-FFF2-40B4-BE49-F238E27FC236}">
+                  <a16:creationId xmlns:a16="http://schemas.microsoft.com/office/drawing/2014/main" id="{1AC962B9-7C7E-1BE3-0C37-F176F3EDF0CE}"/>
+                </a:ext>
+              </a:extLst>
+            </p:cNvPr>
+            <p:cNvSpPr/>
+            <p:nvPr/>
+          </p:nvSpPr>
+          <p:spPr>
+            <a:xfrm>
+              <a:off x="3781153" y="740229"/>
+              <a:ext cx="1610770" cy="719871"/>
+            </a:xfrm>
+            <a:prstGeom prst="rect">
+              <a:avLst/>
+            </a:prstGeom>
+            <a:solidFill>
+              <a:schemeClr val="bg1"/>
+            </a:solidFill>
+            <a:ln w="9525"/>
+          </p:spPr>
+          <p:style>
+            <a:lnRef idx="2">
+              <a:schemeClr val="accent1">
+                <a:shade val="15000"/>
+              </a:schemeClr>
+            </a:lnRef>
+            <a:fillRef idx="1">
+              <a:schemeClr val="accent1"/>
+            </a:fillRef>
+            <a:effectRef idx="0">
+              <a:schemeClr val="accent1"/>
+            </a:effectRef>
+            <a:fontRef idx="minor">
+              <a:schemeClr val="lt1"/>
+            </a:fontRef>
+          </p:style>
+          <p:txBody>
+            <a:bodyPr rtlCol="0" anchor="ctr"/>
+            <a:lstStyle/>
+            <a:p>
+              <a:pPr algn="ctr"/>
+              <a:endParaRPr lang="en-US"/>
+            </a:p>
+          </p:txBody>
+        </p:sp>
+        <p:pic>
+          <p:nvPicPr>
+            <p:cNvPr id="2" name="Picture 1">
+              <a:extLst>
+                <a:ext uri="{FF2B5EF4-FFF2-40B4-BE49-F238E27FC236}">
+                  <a16:creationId xmlns:a16="http://schemas.microsoft.com/office/drawing/2014/main" id="{7D3B141D-936C-6554-C70B-EBE068EB5A6D}"/>
+                </a:ext>
+              </a:extLst>
+            </p:cNvPr>
+            <p:cNvPicPr>
+              <a:picLocks noChangeAspect="1"/>
+            </p:cNvPicPr>
+            <p:nvPr/>
+          </p:nvPicPr>
+          <p:blipFill>
+            <a:blip r:embed="rId3"/>
+            <a:srcRect l="13765" t="30810" r="7541" b="37142"/>
+            <a:stretch>
+              <a:fillRect/>
+            </a:stretch>
+          </p:blipFill>
+          <p:spPr>
+            <a:xfrm>
+              <a:off x="3762103" y="825137"/>
+              <a:ext cx="1610771" cy="596100"/>
+            </a:xfrm>
+            <a:prstGeom prst="rect">
+              <a:avLst/>
+            </a:prstGeom>
+          </p:spPr>
+        </p:pic>
+      </p:grpSp>
     </p:spTree>
     <p:extLst>
       <p:ext uri="{BB962C8B-B14F-4D97-AF65-F5344CB8AC3E}">

--- a/figures/datapaper/scratch_routeyearcombo.pptx
+++ b/figures/datapaper/scratch_routeyearcombo.pptx
@@ -8,6 +8,7 @@
     <p:sldId id="256" r:id="rId2"/>
     <p:sldId id="257" r:id="rId3"/>
     <p:sldId id="258" r:id="rId4"/>
+    <p:sldId id="259" r:id="rId5"/>
   </p:sldIdLst>
   <p:sldSz cx="12192000" cy="6858000"/>
   <p:notesSz cx="6858000" cy="9144000"/>
@@ -261,7 +262,7 @@
           <a:p>
             <a:fld id="{E3CAC27E-A09F-42ED-BD9F-2DE2B5FBE76A}" type="datetimeFigureOut">
               <a:rPr lang="en-US" smtClean="0"/>
-              <a:t>6/2/2026</a:t>
+              <a:t>6/4/2026</a:t>
             </a:fld>
             <a:endParaRPr lang="en-US"/>
           </a:p>
@@ -459,7 +460,7 @@
           <a:p>
             <a:fld id="{E3CAC27E-A09F-42ED-BD9F-2DE2B5FBE76A}" type="datetimeFigureOut">
               <a:rPr lang="en-US" smtClean="0"/>
-              <a:t>6/2/2026</a:t>
+              <a:t>6/4/2026</a:t>
             </a:fld>
             <a:endParaRPr lang="en-US"/>
           </a:p>
@@ -667,7 +668,7 @@
           <a:p>
             <a:fld id="{E3CAC27E-A09F-42ED-BD9F-2DE2B5FBE76A}" type="datetimeFigureOut">
               <a:rPr lang="en-US" smtClean="0"/>
-              <a:t>6/2/2026</a:t>
+              <a:t>6/4/2026</a:t>
             </a:fld>
             <a:endParaRPr lang="en-US"/>
           </a:p>
@@ -865,7 +866,7 @@
           <a:p>
             <a:fld id="{E3CAC27E-A09F-42ED-BD9F-2DE2B5FBE76A}" type="datetimeFigureOut">
               <a:rPr lang="en-US" smtClean="0"/>
-              <a:t>6/2/2026</a:t>
+              <a:t>6/4/2026</a:t>
             </a:fld>
             <a:endParaRPr lang="en-US"/>
           </a:p>
@@ -1140,7 +1141,7 @@
           <a:p>
             <a:fld id="{E3CAC27E-A09F-42ED-BD9F-2DE2B5FBE76A}" type="datetimeFigureOut">
               <a:rPr lang="en-US" smtClean="0"/>
-              <a:t>6/2/2026</a:t>
+              <a:t>6/4/2026</a:t>
             </a:fld>
             <a:endParaRPr lang="en-US"/>
           </a:p>
@@ -1405,7 +1406,7 @@
           <a:p>
             <a:fld id="{E3CAC27E-A09F-42ED-BD9F-2DE2B5FBE76A}" type="datetimeFigureOut">
               <a:rPr lang="en-US" smtClean="0"/>
-              <a:t>6/2/2026</a:t>
+              <a:t>6/4/2026</a:t>
             </a:fld>
             <a:endParaRPr lang="en-US"/>
           </a:p>
@@ -1817,7 +1818,7 @@
           <a:p>
             <a:fld id="{E3CAC27E-A09F-42ED-BD9F-2DE2B5FBE76A}" type="datetimeFigureOut">
               <a:rPr lang="en-US" smtClean="0"/>
-              <a:t>6/2/2026</a:t>
+              <a:t>6/4/2026</a:t>
             </a:fld>
             <a:endParaRPr lang="en-US"/>
           </a:p>
@@ -1958,7 +1959,7 @@
           <a:p>
             <a:fld id="{E3CAC27E-A09F-42ED-BD9F-2DE2B5FBE76A}" type="datetimeFigureOut">
               <a:rPr lang="en-US" smtClean="0"/>
-              <a:t>6/2/2026</a:t>
+              <a:t>6/4/2026</a:t>
             </a:fld>
             <a:endParaRPr lang="en-US"/>
           </a:p>
@@ -2071,7 +2072,7 @@
           <a:p>
             <a:fld id="{E3CAC27E-A09F-42ED-BD9F-2DE2B5FBE76A}" type="datetimeFigureOut">
               <a:rPr lang="en-US" smtClean="0"/>
-              <a:t>6/2/2026</a:t>
+              <a:t>6/4/2026</a:t>
             </a:fld>
             <a:endParaRPr lang="en-US"/>
           </a:p>
@@ -2382,7 +2383,7 @@
           <a:p>
             <a:fld id="{E3CAC27E-A09F-42ED-BD9F-2DE2B5FBE76A}" type="datetimeFigureOut">
               <a:rPr lang="en-US" smtClean="0"/>
-              <a:t>6/2/2026</a:t>
+              <a:t>6/4/2026</a:t>
             </a:fld>
             <a:endParaRPr lang="en-US"/>
           </a:p>
@@ -2670,7 +2671,7 @@
           <a:p>
             <a:fld id="{E3CAC27E-A09F-42ED-BD9F-2DE2B5FBE76A}" type="datetimeFigureOut">
               <a:rPr lang="en-US" smtClean="0"/>
-              <a:t>6/2/2026</a:t>
+              <a:t>6/4/2026</a:t>
             </a:fld>
             <a:endParaRPr lang="en-US"/>
           </a:p>
@@ -2911,7 +2912,7 @@
           <a:p>
             <a:fld id="{E3CAC27E-A09F-42ED-BD9F-2DE2B5FBE76A}" type="datetimeFigureOut">
               <a:rPr lang="en-US" smtClean="0"/>
-              <a:t>6/2/2026</a:t>
+              <a:t>6/4/2026</a:t>
             </a:fld>
             <a:endParaRPr lang="en-US"/>
           </a:p>
@@ -3616,6 +3617,43 @@
           </a:prstGeom>
         </p:spPr>
       </p:pic>
+      <p:pic>
+        <p:nvPicPr>
+          <p:cNvPr id="7" name="Picture 6">
+            <a:extLst>
+              <a:ext uri="{FF2B5EF4-FFF2-40B4-BE49-F238E27FC236}">
+                <a16:creationId xmlns:a16="http://schemas.microsoft.com/office/drawing/2014/main" id="{D91243B8-0D05-68E8-6DF8-0F0D09B99054}"/>
+              </a:ext>
+            </a:extLst>
+          </p:cNvPr>
+          <p:cNvPicPr>
+            <a:picLocks noChangeAspect="1"/>
+          </p:cNvPicPr>
+          <p:nvPr/>
+        </p:nvPicPr>
+        <p:blipFill>
+          <a:blip r:embed="rId7">
+            <a:extLst>
+              <a:ext uri="{28A0092B-C50C-407E-A947-70E740481C1C}">
+                <a14:useLocalDpi xmlns:a14="http://schemas.microsoft.com/office/drawing/2010/main" val="0"/>
+              </a:ext>
+            </a:extLst>
+          </a:blip>
+          <a:srcRect l="11584" t="20538" r="83813" b="74996"/>
+          <a:stretch>
+            <a:fillRect/>
+          </a:stretch>
+        </p:blipFill>
+        <p:spPr>
+          <a:xfrm>
+            <a:off x="3988739" y="2212841"/>
+            <a:ext cx="232410" cy="225429"/>
+          </a:xfrm>
+          <a:prstGeom prst="rect">
+            <a:avLst/>
+          </a:prstGeom>
+        </p:spPr>
+      </p:pic>
     </p:spTree>
     <p:extLst>
       <p:ext uri="{BB962C8B-B14F-4D97-AF65-F5344CB8AC3E}">
@@ -3648,10 +3686,10 @@
       </p:grpSpPr>
       <p:pic>
         <p:nvPicPr>
-          <p:cNvPr id="3" name="Picture 2">
-            <a:extLst>
-              <a:ext uri="{FF2B5EF4-FFF2-40B4-BE49-F238E27FC236}">
-                <a16:creationId xmlns:a16="http://schemas.microsoft.com/office/drawing/2014/main" id="{C6B29AED-33F6-8862-CA08-D03D27E93F0B}"/>
+          <p:cNvPr id="13" name="Picture 12">
+            <a:extLst>
+              <a:ext uri="{FF2B5EF4-FFF2-40B4-BE49-F238E27FC236}">
+                <a16:creationId xmlns:a16="http://schemas.microsoft.com/office/drawing/2014/main" id="{5633356F-20A3-E7FA-9622-9D02B4393A2C}"/>
               </a:ext>
             </a:extLst>
           </p:cNvPr>
@@ -3661,7 +3699,43 @@
           <p:nvPr/>
         </p:nvPicPr>
         <p:blipFill>
-          <a:blip r:embed="rId2"/>
+          <a:blip r:embed="rId2">
+            <a:extLst>
+              <a:ext uri="{28A0092B-C50C-407E-A947-70E740481C1C}">
+                <a14:useLocalDpi xmlns:a14="http://schemas.microsoft.com/office/drawing/2010/main" val="0"/>
+              </a:ext>
+            </a:extLst>
+          </a:blip>
+          <a:stretch>
+            <a:fillRect/>
+          </a:stretch>
+        </p:blipFill>
+        <p:spPr>
+          <a:xfrm>
+            <a:off x="2560107" y="804496"/>
+            <a:ext cx="7049484" cy="5249008"/>
+          </a:xfrm>
+          <a:prstGeom prst="rect">
+            <a:avLst/>
+          </a:prstGeom>
+        </p:spPr>
+      </p:pic>
+      <p:pic>
+        <p:nvPicPr>
+          <p:cNvPr id="3" name="Picture 2">
+            <a:extLst>
+              <a:ext uri="{FF2B5EF4-FFF2-40B4-BE49-F238E27FC236}">
+                <a16:creationId xmlns:a16="http://schemas.microsoft.com/office/drawing/2014/main" id="{C6B29AED-33F6-8862-CA08-D03D27E93F0B}"/>
+              </a:ext>
+            </a:extLst>
+          </p:cNvPr>
+          <p:cNvPicPr>
+            <a:picLocks noChangeAspect="1"/>
+          </p:cNvPicPr>
+          <p:nvPr/>
+        </p:nvPicPr>
+        <p:blipFill>
+          <a:blip r:embed="rId3"/>
           <a:stretch>
             <a:fillRect/>
           </a:stretch>
@@ -3943,7 +4017,7 @@
             <p:nvPr/>
           </p:nvPicPr>
           <p:blipFill>
-            <a:blip r:embed="rId3"/>
+            <a:blip r:embed="rId4"/>
             <a:srcRect l="13765" t="30810" r="7541" b="37142"/>
             <a:stretch>
               <a:fillRect/>
@@ -3964,6 +4038,553 @@
     <p:extLst>
       <p:ext uri="{BB962C8B-B14F-4D97-AF65-F5344CB8AC3E}">
         <p14:creationId xmlns:p14="http://schemas.microsoft.com/office/powerpoint/2010/main" val="3317801591"/>
+      </p:ext>
+    </p:extLst>
+  </p:cSld>
+  <p:clrMapOvr>
+    <a:masterClrMapping/>
+  </p:clrMapOvr>
+</p:sld>
+</file>
+
+<file path=ppt/slides/slide4.xml><?xml version="1.0" encoding="utf-8"?>
+<p:sld xmlns:a="http://schemas.openxmlformats.org/drawingml/2006/main" xmlns:r="http://schemas.openxmlformats.org/officeDocument/2006/relationships" xmlns:p="http://schemas.openxmlformats.org/presentationml/2006/main">
+  <p:cSld>
+    <p:spTree>
+      <p:nvGrpSpPr>
+        <p:cNvPr id="1" name="">
+          <a:extLst>
+            <a:ext uri="{FF2B5EF4-FFF2-40B4-BE49-F238E27FC236}">
+              <a16:creationId xmlns:a16="http://schemas.microsoft.com/office/drawing/2014/main" id="{52192C26-7CB2-B045-9366-03AD8A296B90}"/>
+            </a:ext>
+          </a:extLst>
+        </p:cNvPr>
+        <p:cNvGrpSpPr/>
+        <p:nvPr/>
+      </p:nvGrpSpPr>
+      <p:grpSpPr>
+        <a:xfrm>
+          <a:off x="0" y="0"/>
+          <a:ext cx="0" cy="0"/>
+          <a:chOff x="0" y="0"/>
+          <a:chExt cx="0" cy="0"/>
+        </a:xfrm>
+      </p:grpSpPr>
+      <p:pic>
+        <p:nvPicPr>
+          <p:cNvPr id="9" name="Picture 8">
+            <a:extLst>
+              <a:ext uri="{FF2B5EF4-FFF2-40B4-BE49-F238E27FC236}">
+                <a16:creationId xmlns:a16="http://schemas.microsoft.com/office/drawing/2014/main" id="{C536DFB1-6EFC-94CE-A1DA-2B4A82383FAF}"/>
+              </a:ext>
+            </a:extLst>
+          </p:cNvPr>
+          <p:cNvPicPr>
+            <a:picLocks noChangeAspect="1"/>
+          </p:cNvPicPr>
+          <p:nvPr/>
+        </p:nvPicPr>
+        <p:blipFill>
+          <a:blip r:embed="rId2">
+            <a:extLst>
+              <a:ext uri="{28A0092B-C50C-407E-A947-70E740481C1C}">
+                <a14:useLocalDpi xmlns:a14="http://schemas.microsoft.com/office/drawing/2010/main" val="0"/>
+              </a:ext>
+            </a:extLst>
+          </a:blip>
+          <a:stretch>
+            <a:fillRect/>
+          </a:stretch>
+        </p:blipFill>
+        <p:spPr>
+          <a:xfrm>
+            <a:off x="2561733" y="804496"/>
+            <a:ext cx="7049484" cy="5249008"/>
+          </a:xfrm>
+          <a:prstGeom prst="rect">
+            <a:avLst/>
+          </a:prstGeom>
+        </p:spPr>
+      </p:pic>
+      <p:cxnSp>
+        <p:nvCxnSpPr>
+          <p:cNvPr id="5" name="Straight Connector 4">
+            <a:extLst>
+              <a:ext uri="{FF2B5EF4-FFF2-40B4-BE49-F238E27FC236}">
+                <a16:creationId xmlns:a16="http://schemas.microsoft.com/office/drawing/2014/main" id="{8565E4FF-6AE7-0177-BB14-08FED947F920}"/>
+              </a:ext>
+            </a:extLst>
+          </p:cNvPr>
+          <p:cNvCxnSpPr>
+            <a:cxnSpLocks/>
+          </p:cNvCxnSpPr>
+          <p:nvPr/>
+        </p:nvCxnSpPr>
+        <p:spPr>
+          <a:xfrm>
+            <a:off x="4314825" y="1162050"/>
+            <a:ext cx="3543300" cy="0"/>
+          </a:xfrm>
+          <a:prstGeom prst="line">
+            <a:avLst/>
+          </a:prstGeom>
+          <a:ln w="9525"/>
+        </p:spPr>
+        <p:style>
+          <a:lnRef idx="2">
+            <a:schemeClr val="dk1"/>
+          </a:lnRef>
+          <a:fillRef idx="0">
+            <a:schemeClr val="dk1"/>
+          </a:fillRef>
+          <a:effectRef idx="1">
+            <a:schemeClr val="dk1"/>
+          </a:effectRef>
+          <a:fontRef idx="minor">
+            <a:schemeClr val="tx1"/>
+          </a:fontRef>
+        </p:style>
+      </p:cxnSp>
+      <p:cxnSp>
+        <p:nvCxnSpPr>
+          <p:cNvPr id="6" name="Straight Connector 5">
+            <a:extLst>
+              <a:ext uri="{FF2B5EF4-FFF2-40B4-BE49-F238E27FC236}">
+                <a16:creationId xmlns:a16="http://schemas.microsoft.com/office/drawing/2014/main" id="{8ABBDA71-2BD3-1CC9-D20C-8BBC4EA0999F}"/>
+              </a:ext>
+            </a:extLst>
+          </p:cNvPr>
+          <p:cNvCxnSpPr>
+            <a:cxnSpLocks/>
+          </p:cNvCxnSpPr>
+          <p:nvPr/>
+        </p:nvCxnSpPr>
+        <p:spPr>
+          <a:xfrm>
+            <a:off x="7858125" y="1162050"/>
+            <a:ext cx="0" cy="4524375"/>
+          </a:xfrm>
+          <a:prstGeom prst="line">
+            <a:avLst/>
+          </a:prstGeom>
+          <a:ln w="9525"/>
+        </p:spPr>
+        <p:style>
+          <a:lnRef idx="2">
+            <a:schemeClr val="dk1"/>
+          </a:lnRef>
+          <a:fillRef idx="0">
+            <a:schemeClr val="dk1"/>
+          </a:fillRef>
+          <a:effectRef idx="1">
+            <a:schemeClr val="dk1"/>
+          </a:effectRef>
+          <a:fontRef idx="minor">
+            <a:schemeClr val="tx1"/>
+          </a:fontRef>
+        </p:style>
+      </p:cxnSp>
+      <p:sp>
+        <p:nvSpPr>
+          <p:cNvPr id="10" name="Rectangle 9">
+            <a:extLst>
+              <a:ext uri="{FF2B5EF4-FFF2-40B4-BE49-F238E27FC236}">
+                <a16:creationId xmlns:a16="http://schemas.microsoft.com/office/drawing/2014/main" id="{AFD0DED7-46B0-6BB5-EE69-200B4B0A8648}"/>
+              </a:ext>
+            </a:extLst>
+          </p:cNvPr>
+          <p:cNvSpPr/>
+          <p:nvPr/>
+        </p:nvSpPr>
+        <p:spPr>
+          <a:xfrm>
+            <a:off x="3676650" y="5680048"/>
+            <a:ext cx="628650" cy="371470"/>
+          </a:xfrm>
+          <a:prstGeom prst="rect">
+            <a:avLst/>
+          </a:prstGeom>
+          <a:solidFill>
+            <a:schemeClr val="bg1"/>
+          </a:solidFill>
+          <a:ln>
+            <a:solidFill>
+              <a:schemeClr val="bg1"/>
+            </a:solidFill>
+          </a:ln>
+        </p:spPr>
+        <p:style>
+          <a:lnRef idx="2">
+            <a:schemeClr val="accent6"/>
+          </a:lnRef>
+          <a:fillRef idx="1">
+            <a:schemeClr val="lt1"/>
+          </a:fillRef>
+          <a:effectRef idx="0">
+            <a:schemeClr val="accent6"/>
+          </a:effectRef>
+          <a:fontRef idx="minor">
+            <a:schemeClr val="dk1"/>
+          </a:fontRef>
+        </p:style>
+        <p:txBody>
+          <a:bodyPr rtlCol="0" anchor="ctr"/>
+          <a:lstStyle/>
+          <a:p>
+            <a:pPr algn="ctr"/>
+            <a:endParaRPr lang="en-US"/>
+          </a:p>
+        </p:txBody>
+      </p:sp>
+      <p:sp>
+        <p:nvSpPr>
+          <p:cNvPr id="11" name="Rectangle 10">
+            <a:extLst>
+              <a:ext uri="{FF2B5EF4-FFF2-40B4-BE49-F238E27FC236}">
+                <a16:creationId xmlns:a16="http://schemas.microsoft.com/office/drawing/2014/main" id="{0AC7C9A0-E54C-A75E-C2B7-F96A0040C081}"/>
+              </a:ext>
+            </a:extLst>
+          </p:cNvPr>
+          <p:cNvSpPr/>
+          <p:nvPr/>
+        </p:nvSpPr>
+        <p:spPr>
+          <a:xfrm>
+            <a:off x="7869225" y="5662610"/>
+            <a:ext cx="828673" cy="371470"/>
+          </a:xfrm>
+          <a:prstGeom prst="rect">
+            <a:avLst/>
+          </a:prstGeom>
+          <a:solidFill>
+            <a:schemeClr val="bg1"/>
+          </a:solidFill>
+          <a:ln>
+            <a:solidFill>
+              <a:schemeClr val="bg1"/>
+            </a:solidFill>
+          </a:ln>
+        </p:spPr>
+        <p:style>
+          <a:lnRef idx="2">
+            <a:schemeClr val="accent6"/>
+          </a:lnRef>
+          <a:fillRef idx="1">
+            <a:schemeClr val="lt1"/>
+          </a:fillRef>
+          <a:effectRef idx="0">
+            <a:schemeClr val="accent6"/>
+          </a:effectRef>
+          <a:fontRef idx="minor">
+            <a:schemeClr val="dk1"/>
+          </a:fontRef>
+        </p:style>
+        <p:txBody>
+          <a:bodyPr rtlCol="0" anchor="ctr"/>
+          <a:lstStyle/>
+          <a:p>
+            <a:pPr algn="ctr"/>
+            <a:endParaRPr lang="en-US"/>
+          </a:p>
+        </p:txBody>
+      </p:sp>
+      <p:grpSp>
+        <p:nvGrpSpPr>
+          <p:cNvPr id="7" name="Group 6">
+            <a:extLst>
+              <a:ext uri="{FF2B5EF4-FFF2-40B4-BE49-F238E27FC236}">
+                <a16:creationId xmlns:a16="http://schemas.microsoft.com/office/drawing/2014/main" id="{BC56AF86-7B2B-26B5-1FCF-088DC1D34639}"/>
+              </a:ext>
+            </a:extLst>
+          </p:cNvPr>
+          <p:cNvGrpSpPr/>
+          <p:nvPr/>
+        </p:nvGrpSpPr>
+        <p:grpSpPr>
+          <a:xfrm>
+            <a:off x="3631468" y="714102"/>
+            <a:ext cx="1629820" cy="719871"/>
+            <a:chOff x="3762103" y="740229"/>
+            <a:chExt cx="1629820" cy="719871"/>
+          </a:xfrm>
+        </p:grpSpPr>
+        <p:sp>
+          <p:nvSpPr>
+            <p:cNvPr id="4" name="Rectangle 3">
+              <a:extLst>
+                <a:ext uri="{FF2B5EF4-FFF2-40B4-BE49-F238E27FC236}">
+                  <a16:creationId xmlns:a16="http://schemas.microsoft.com/office/drawing/2014/main" id="{5D94B056-B2B5-DD00-F0CE-E44F81808BAE}"/>
+                </a:ext>
+              </a:extLst>
+            </p:cNvPr>
+            <p:cNvSpPr/>
+            <p:nvPr/>
+          </p:nvSpPr>
+          <p:spPr>
+            <a:xfrm>
+              <a:off x="3781153" y="740229"/>
+              <a:ext cx="1610770" cy="719871"/>
+            </a:xfrm>
+            <a:prstGeom prst="rect">
+              <a:avLst/>
+            </a:prstGeom>
+            <a:solidFill>
+              <a:schemeClr val="bg1"/>
+            </a:solidFill>
+            <a:ln w="9525"/>
+          </p:spPr>
+          <p:style>
+            <a:lnRef idx="2">
+              <a:schemeClr val="accent1">
+                <a:shade val="15000"/>
+              </a:schemeClr>
+            </a:lnRef>
+            <a:fillRef idx="1">
+              <a:schemeClr val="accent1"/>
+            </a:fillRef>
+            <a:effectRef idx="0">
+              <a:schemeClr val="accent1"/>
+            </a:effectRef>
+            <a:fontRef idx="minor">
+              <a:schemeClr val="lt1"/>
+            </a:fontRef>
+          </p:style>
+          <p:txBody>
+            <a:bodyPr rtlCol="0" anchor="ctr"/>
+            <a:lstStyle/>
+            <a:p>
+              <a:pPr algn="ctr"/>
+              <a:endParaRPr lang="en-US"/>
+            </a:p>
+          </p:txBody>
+        </p:sp>
+        <p:pic>
+          <p:nvPicPr>
+            <p:cNvPr id="2" name="Picture 1">
+              <a:extLst>
+                <a:ext uri="{FF2B5EF4-FFF2-40B4-BE49-F238E27FC236}">
+                  <a16:creationId xmlns:a16="http://schemas.microsoft.com/office/drawing/2014/main" id="{58AEF9B7-98AE-9F37-1FB9-ACFFD000AEA8}"/>
+                </a:ext>
+              </a:extLst>
+            </p:cNvPr>
+            <p:cNvPicPr>
+              <a:picLocks noChangeAspect="1"/>
+            </p:cNvPicPr>
+            <p:nvPr/>
+          </p:nvPicPr>
+          <p:blipFill>
+            <a:blip r:embed="rId3"/>
+            <a:srcRect l="13765" t="30810" r="7541" b="37142"/>
+            <a:stretch>
+              <a:fillRect/>
+            </a:stretch>
+          </p:blipFill>
+          <p:spPr>
+            <a:xfrm>
+              <a:off x="3762103" y="825137"/>
+              <a:ext cx="1610771" cy="596100"/>
+            </a:xfrm>
+            <a:prstGeom prst="rect">
+              <a:avLst/>
+            </a:prstGeom>
+          </p:spPr>
+        </p:pic>
+      </p:grpSp>
+      <p:pic>
+        <p:nvPicPr>
+          <p:cNvPr id="16" name="Picture 15">
+            <a:extLst>
+              <a:ext uri="{FF2B5EF4-FFF2-40B4-BE49-F238E27FC236}">
+                <a16:creationId xmlns:a16="http://schemas.microsoft.com/office/drawing/2014/main" id="{B26EB012-97C2-1DCC-9EA0-2BE3F113F08A}"/>
+              </a:ext>
+            </a:extLst>
+          </p:cNvPr>
+          <p:cNvPicPr>
+            <a:picLocks noChangeAspect="1"/>
+          </p:cNvPicPr>
+          <p:nvPr/>
+        </p:nvPicPr>
+        <p:blipFill>
+          <a:blip r:embed="rId4">
+            <a:extLst>
+              <a:ext uri="{28A0092B-C50C-407E-A947-70E740481C1C}">
+                <a14:useLocalDpi xmlns:a14="http://schemas.microsoft.com/office/drawing/2010/main" val="0"/>
+              </a:ext>
+            </a:extLst>
+          </a:blip>
+          <a:srcRect l="32165" t="21692" r="32165" b="22600"/>
+          <a:stretch>
+            <a:fillRect/>
+          </a:stretch>
+        </p:blipFill>
+        <p:spPr>
+          <a:xfrm>
+            <a:off x="7858125" y="1088351"/>
+            <a:ext cx="1580239" cy="1837630"/>
+          </a:xfrm>
+          <a:prstGeom prst="rect">
+            <a:avLst/>
+          </a:prstGeom>
+        </p:spPr>
+      </p:pic>
+      <p:cxnSp>
+        <p:nvCxnSpPr>
+          <p:cNvPr id="17" name="Straight Connector 16">
+            <a:extLst>
+              <a:ext uri="{FF2B5EF4-FFF2-40B4-BE49-F238E27FC236}">
+                <a16:creationId xmlns:a16="http://schemas.microsoft.com/office/drawing/2014/main" id="{5D58E6F5-BA19-0FC9-B98A-043E4289976E}"/>
+              </a:ext>
+            </a:extLst>
+          </p:cNvPr>
+          <p:cNvCxnSpPr>
+            <a:cxnSpLocks/>
+          </p:cNvCxnSpPr>
+          <p:nvPr/>
+        </p:nvCxnSpPr>
+        <p:spPr>
+          <a:xfrm>
+            <a:off x="7902545" y="1162050"/>
+            <a:ext cx="0" cy="1729095"/>
+          </a:xfrm>
+          <a:prstGeom prst="line">
+            <a:avLst/>
+          </a:prstGeom>
+          <a:ln w="9525"/>
+        </p:spPr>
+        <p:style>
+          <a:lnRef idx="2">
+            <a:schemeClr val="dk1"/>
+          </a:lnRef>
+          <a:fillRef idx="0">
+            <a:schemeClr val="dk1"/>
+          </a:fillRef>
+          <a:effectRef idx="1">
+            <a:schemeClr val="dk1"/>
+          </a:effectRef>
+          <a:fontRef idx="minor">
+            <a:schemeClr val="tx1"/>
+          </a:fontRef>
+        </p:style>
+      </p:cxnSp>
+      <p:cxnSp>
+        <p:nvCxnSpPr>
+          <p:cNvPr id="27" name="Straight Connector 26">
+            <a:extLst>
+              <a:ext uri="{FF2B5EF4-FFF2-40B4-BE49-F238E27FC236}">
+                <a16:creationId xmlns:a16="http://schemas.microsoft.com/office/drawing/2014/main" id="{0AF2B8AD-4D31-3C3C-3EE0-ED65572532BE}"/>
+              </a:ext>
+            </a:extLst>
+          </p:cNvPr>
+          <p:cNvCxnSpPr>
+            <a:cxnSpLocks/>
+          </p:cNvCxnSpPr>
+          <p:nvPr/>
+        </p:nvCxnSpPr>
+        <p:spPr>
+          <a:xfrm>
+            <a:off x="7903303" y="1154099"/>
+            <a:ext cx="1484816" cy="0"/>
+          </a:xfrm>
+          <a:prstGeom prst="line">
+            <a:avLst/>
+          </a:prstGeom>
+          <a:ln w="9525"/>
+        </p:spPr>
+        <p:style>
+          <a:lnRef idx="2">
+            <a:schemeClr val="dk1"/>
+          </a:lnRef>
+          <a:fillRef idx="0">
+            <a:schemeClr val="dk1"/>
+          </a:fillRef>
+          <a:effectRef idx="1">
+            <a:schemeClr val="dk1"/>
+          </a:effectRef>
+          <a:fontRef idx="minor">
+            <a:schemeClr val="tx1"/>
+          </a:fontRef>
+        </p:style>
+      </p:cxnSp>
+      <p:cxnSp>
+        <p:nvCxnSpPr>
+          <p:cNvPr id="31" name="Straight Connector 30">
+            <a:extLst>
+              <a:ext uri="{FF2B5EF4-FFF2-40B4-BE49-F238E27FC236}">
+                <a16:creationId xmlns:a16="http://schemas.microsoft.com/office/drawing/2014/main" id="{2A8D37A0-1C75-0ECF-7A2B-DDAEF011A7BD}"/>
+              </a:ext>
+            </a:extLst>
+          </p:cNvPr>
+          <p:cNvCxnSpPr>
+            <a:cxnSpLocks/>
+          </p:cNvCxnSpPr>
+          <p:nvPr/>
+        </p:nvCxnSpPr>
+        <p:spPr>
+          <a:xfrm>
+            <a:off x="7903303" y="2878835"/>
+            <a:ext cx="1484816" cy="0"/>
+          </a:xfrm>
+          <a:prstGeom prst="line">
+            <a:avLst/>
+          </a:prstGeom>
+          <a:ln w="9525"/>
+        </p:spPr>
+        <p:style>
+          <a:lnRef idx="2">
+            <a:schemeClr val="dk1"/>
+          </a:lnRef>
+          <a:fillRef idx="0">
+            <a:schemeClr val="dk1"/>
+          </a:fillRef>
+          <a:effectRef idx="1">
+            <a:schemeClr val="dk1"/>
+          </a:effectRef>
+          <a:fontRef idx="minor">
+            <a:schemeClr val="tx1"/>
+          </a:fontRef>
+        </p:style>
+      </p:cxnSp>
+      <p:pic>
+        <p:nvPicPr>
+          <p:cNvPr id="36" name="Picture 35">
+            <a:extLst>
+              <a:ext uri="{FF2B5EF4-FFF2-40B4-BE49-F238E27FC236}">
+                <a16:creationId xmlns:a16="http://schemas.microsoft.com/office/drawing/2014/main" id="{038E21A0-BDA8-FCD7-39AE-69571ED0588B}"/>
+              </a:ext>
+            </a:extLst>
+          </p:cNvPr>
+          <p:cNvPicPr>
+            <a:picLocks noChangeAspect="1"/>
+          </p:cNvPicPr>
+          <p:nvPr/>
+        </p:nvPicPr>
+        <p:blipFill>
+          <a:blip r:embed="rId5">
+            <a:extLst>
+              <a:ext uri="{28A0092B-C50C-407E-A947-70E740481C1C}">
+                <a14:useLocalDpi xmlns:a14="http://schemas.microsoft.com/office/drawing/2010/main" val="0"/>
+              </a:ext>
+            </a:extLst>
+          </a:blip>
+          <a:srcRect l="38141" t="42785" r="38264" b="43174"/>
+          <a:stretch>
+            <a:fillRect/>
+          </a:stretch>
+        </p:blipFill>
+        <p:spPr>
+          <a:xfrm>
+            <a:off x="7877176" y="2850960"/>
+            <a:ext cx="1101360" cy="488010"/>
+          </a:xfrm>
+          <a:prstGeom prst="rect">
+            <a:avLst/>
+          </a:prstGeom>
+        </p:spPr>
+      </p:pic>
+    </p:spTree>
+    <p:extLst>
+      <p:ext uri="{BB962C8B-B14F-4D97-AF65-F5344CB8AC3E}">
+        <p14:creationId xmlns:p14="http://schemas.microsoft.com/office/powerpoint/2010/main" val="3298822386"/>
       </p:ext>
     </p:extLst>
   </p:cSld>

--- a/figures/datapaper/scratch_routeyearcombo.pptx
+++ b/figures/datapaper/scratch_routeyearcombo.pptx
@@ -6,9 +6,10 @@
   </p:sldMasterIdLst>
   <p:sldIdLst>
     <p:sldId id="256" r:id="rId2"/>
-    <p:sldId id="257" r:id="rId3"/>
-    <p:sldId id="258" r:id="rId4"/>
-    <p:sldId id="259" r:id="rId5"/>
+    <p:sldId id="260" r:id="rId3"/>
+    <p:sldId id="257" r:id="rId4"/>
+    <p:sldId id="258" r:id="rId5"/>
+    <p:sldId id="259" r:id="rId6"/>
   </p:sldIdLst>
   <p:sldSz cx="12192000" cy="6858000"/>
   <p:notesSz cx="6858000" cy="9144000"/>
@@ -3421,6 +3422,190 @@
   <p:cSld>
     <p:spTree>
       <p:nvGrpSpPr>
+        <p:cNvPr id="1" name="">
+          <a:extLst>
+            <a:ext uri="{FF2B5EF4-FFF2-40B4-BE49-F238E27FC236}">
+              <a16:creationId xmlns:a16="http://schemas.microsoft.com/office/drawing/2014/main" id="{CCDDFB1F-F0B0-F958-378B-EAAAE0A954B9}"/>
+            </a:ext>
+          </a:extLst>
+        </p:cNvPr>
+        <p:cNvGrpSpPr/>
+        <p:nvPr/>
+      </p:nvGrpSpPr>
+      <p:grpSpPr>
+        <a:xfrm>
+          <a:off x="0" y="0"/>
+          <a:ext cx="0" cy="0"/>
+          <a:chOff x="0" y="0"/>
+          <a:chExt cx="0" cy="0"/>
+        </a:xfrm>
+      </p:grpSpPr>
+      <p:pic>
+        <p:nvPicPr>
+          <p:cNvPr id="3" name="Picture 2">
+            <a:extLst>
+              <a:ext uri="{FF2B5EF4-FFF2-40B4-BE49-F238E27FC236}">
+                <a16:creationId xmlns:a16="http://schemas.microsoft.com/office/drawing/2014/main" id="{CD04D5FB-9502-BB15-2298-8879978A2F8B}"/>
+              </a:ext>
+            </a:extLst>
+          </p:cNvPr>
+          <p:cNvPicPr>
+            <a:picLocks noChangeAspect="1"/>
+          </p:cNvPicPr>
+          <p:nvPr/>
+        </p:nvPicPr>
+        <p:blipFill>
+          <a:blip r:embed="rId2">
+            <a:extLst>
+              <a:ext uri="{28A0092B-C50C-407E-A947-70E740481C1C}">
+                <a14:useLocalDpi xmlns:a14="http://schemas.microsoft.com/office/drawing/2010/main" val="0"/>
+              </a:ext>
+            </a:extLst>
+          </a:blip>
+          <a:srcRect l="2222" b="4276"/>
+          <a:stretch>
+            <a:fillRect/>
+          </a:stretch>
+        </p:blipFill>
+        <p:spPr>
+          <a:xfrm>
+            <a:off x="5268332" y="1374793"/>
+            <a:ext cx="5029201" cy="4832369"/>
+          </a:xfrm>
+          <a:prstGeom prst="rect">
+            <a:avLst/>
+          </a:prstGeom>
+        </p:spPr>
+      </p:pic>
+      <p:pic>
+        <p:nvPicPr>
+          <p:cNvPr id="5" name="Picture 4">
+            <a:extLst>
+              <a:ext uri="{FF2B5EF4-FFF2-40B4-BE49-F238E27FC236}">
+                <a16:creationId xmlns:a16="http://schemas.microsoft.com/office/drawing/2014/main" id="{C44F5C3E-BBBC-0B83-4125-93CBC522F852}"/>
+              </a:ext>
+            </a:extLst>
+          </p:cNvPr>
+          <p:cNvPicPr>
+            <a:picLocks noChangeAspect="1"/>
+          </p:cNvPicPr>
+          <p:nvPr/>
+        </p:nvPicPr>
+        <p:blipFill>
+          <a:blip r:embed="rId3">
+            <a:extLst>
+              <a:ext uri="{28A0092B-C50C-407E-A947-70E740481C1C}">
+                <a14:useLocalDpi xmlns:a14="http://schemas.microsoft.com/office/drawing/2010/main" val="0"/>
+              </a:ext>
+            </a:extLst>
+          </a:blip>
+          <a:srcRect l="10755" t="10862" r="68868" b="73289"/>
+          <a:stretch>
+            <a:fillRect/>
+          </a:stretch>
+        </p:blipFill>
+        <p:spPr>
+          <a:xfrm>
+            <a:off x="4229100" y="1643743"/>
+            <a:ext cx="1028700" cy="800100"/>
+          </a:xfrm>
+          <a:prstGeom prst="rect">
+            <a:avLst/>
+          </a:prstGeom>
+        </p:spPr>
+      </p:pic>
+      <p:pic>
+        <p:nvPicPr>
+          <p:cNvPr id="4" name="Picture 3">
+            <a:extLst>
+              <a:ext uri="{FF2B5EF4-FFF2-40B4-BE49-F238E27FC236}">
+                <a16:creationId xmlns:a16="http://schemas.microsoft.com/office/drawing/2014/main" id="{C85A7A7E-4A99-F272-CBA4-C03C4011C2B9}"/>
+              </a:ext>
+            </a:extLst>
+          </p:cNvPr>
+          <p:cNvPicPr>
+            <a:picLocks noChangeAspect="1"/>
+          </p:cNvPicPr>
+          <p:nvPr/>
+        </p:nvPicPr>
+        <p:blipFill>
+          <a:blip r:embed="rId4">
+            <a:extLst>
+              <a:ext uri="{28A0092B-C50C-407E-A947-70E740481C1C}">
+                <a14:useLocalDpi xmlns:a14="http://schemas.microsoft.com/office/drawing/2010/main" val="0"/>
+              </a:ext>
+            </a:extLst>
+          </a:blip>
+          <a:srcRect l="2222"/>
+          <a:stretch>
+            <a:fillRect/>
+          </a:stretch>
+        </p:blipFill>
+        <p:spPr>
+          <a:xfrm>
+            <a:off x="5265329" y="1374793"/>
+            <a:ext cx="5029202" cy="5048250"/>
+          </a:xfrm>
+          <a:prstGeom prst="rect">
+            <a:avLst/>
+          </a:prstGeom>
+        </p:spPr>
+      </p:pic>
+      <p:pic>
+        <p:nvPicPr>
+          <p:cNvPr id="9" name="Picture 8">
+            <a:extLst>
+              <a:ext uri="{FF2B5EF4-FFF2-40B4-BE49-F238E27FC236}">
+                <a16:creationId xmlns:a16="http://schemas.microsoft.com/office/drawing/2014/main" id="{FC548897-452C-2EEA-5569-DC9DE74879A0}"/>
+              </a:ext>
+            </a:extLst>
+          </p:cNvPr>
+          <p:cNvPicPr>
+            <a:picLocks noChangeAspect="1"/>
+          </p:cNvPicPr>
+          <p:nvPr/>
+        </p:nvPicPr>
+        <p:blipFill>
+          <a:blip r:embed="rId5">
+            <a:extLst>
+              <a:ext uri="{28A0092B-C50C-407E-A947-70E740481C1C}">
+                <a14:useLocalDpi xmlns:a14="http://schemas.microsoft.com/office/drawing/2010/main" val="0"/>
+              </a:ext>
+            </a:extLst>
+          </a:blip>
+          <a:srcRect l="9544" t="9614" r="70079" b="74537"/>
+          <a:stretch>
+            <a:fillRect/>
+          </a:stretch>
+        </p:blipFill>
+        <p:spPr>
+          <a:xfrm>
+            <a:off x="4149360" y="1579945"/>
+            <a:ext cx="1028700" cy="800100"/>
+          </a:xfrm>
+          <a:prstGeom prst="rect">
+            <a:avLst/>
+          </a:prstGeom>
+        </p:spPr>
+      </p:pic>
+    </p:spTree>
+    <p:extLst>
+      <p:ext uri="{BB962C8B-B14F-4D97-AF65-F5344CB8AC3E}">
+        <p14:creationId xmlns:p14="http://schemas.microsoft.com/office/powerpoint/2010/main" val="4111417147"/>
+      </p:ext>
+    </p:extLst>
+  </p:cSld>
+  <p:clrMapOvr>
+    <a:masterClrMapping/>
+  </p:clrMapOvr>
+</p:sld>
+</file>
+
+<file path=ppt/slides/slide3.xml><?xml version="1.0" encoding="utf-8"?>
+<p:sld xmlns:a="http://schemas.openxmlformats.org/drawingml/2006/main" xmlns:r="http://schemas.openxmlformats.org/officeDocument/2006/relationships" xmlns:p="http://schemas.openxmlformats.org/presentationml/2006/main">
+  <p:cSld>
+    <p:spTree>
+      <p:nvGrpSpPr>
         <p:cNvPr id="1" name=""/>
         <p:cNvGrpSpPr/>
         <p:nvPr/>
@@ -3654,6 +3839,80 @@
           </a:prstGeom>
         </p:spPr>
       </p:pic>
+      <p:pic>
+        <p:nvPicPr>
+          <p:cNvPr id="4" name="Picture 3">
+            <a:extLst>
+              <a:ext uri="{FF2B5EF4-FFF2-40B4-BE49-F238E27FC236}">
+                <a16:creationId xmlns:a16="http://schemas.microsoft.com/office/drawing/2014/main" id="{CA97DF09-A4B3-2F19-6A10-D010960E2076}"/>
+              </a:ext>
+            </a:extLst>
+          </p:cNvPr>
+          <p:cNvPicPr>
+            <a:picLocks noChangeAspect="1"/>
+          </p:cNvPicPr>
+          <p:nvPr/>
+        </p:nvPicPr>
+        <p:blipFill>
+          <a:blip r:embed="rId6">
+            <a:extLst>
+              <a:ext uri="{28A0092B-C50C-407E-A947-70E740481C1C}">
+                <a14:useLocalDpi xmlns:a14="http://schemas.microsoft.com/office/drawing/2010/main" val="0"/>
+              </a:ext>
+            </a:extLst>
+          </a:blip>
+          <a:srcRect l="12179" t="21188" r="84990" b="75422"/>
+          <a:stretch>
+            <a:fillRect/>
+          </a:stretch>
+        </p:blipFill>
+        <p:spPr>
+          <a:xfrm>
+            <a:off x="4025151" y="2481224"/>
+            <a:ext cx="142913" cy="171129"/>
+          </a:xfrm>
+          <a:prstGeom prst="rect">
+            <a:avLst/>
+          </a:prstGeom>
+        </p:spPr>
+      </p:pic>
+      <p:pic>
+        <p:nvPicPr>
+          <p:cNvPr id="6" name="Picture 5">
+            <a:extLst>
+              <a:ext uri="{FF2B5EF4-FFF2-40B4-BE49-F238E27FC236}">
+                <a16:creationId xmlns:a16="http://schemas.microsoft.com/office/drawing/2014/main" id="{C67296B8-95AF-5BA7-B333-B878CDB90332}"/>
+              </a:ext>
+            </a:extLst>
+          </p:cNvPr>
+          <p:cNvPicPr>
+            <a:picLocks noChangeAspect="1"/>
+          </p:cNvPicPr>
+          <p:nvPr/>
+        </p:nvPicPr>
+        <p:blipFill>
+          <a:blip r:embed="rId8">
+            <a:extLst>
+              <a:ext uri="{28A0092B-C50C-407E-A947-70E740481C1C}">
+                <a14:useLocalDpi xmlns:a14="http://schemas.microsoft.com/office/drawing/2010/main" val="0"/>
+              </a:ext>
+            </a:extLst>
+          </a:blip>
+          <a:srcRect l="2222"/>
+          <a:stretch>
+            <a:fillRect/>
+          </a:stretch>
+        </p:blipFill>
+        <p:spPr>
+          <a:xfrm>
+            <a:off x="5314847" y="1374793"/>
+            <a:ext cx="5029202" cy="5048250"/>
+          </a:xfrm>
+          <a:prstGeom prst="rect">
+            <a:avLst/>
+          </a:prstGeom>
+        </p:spPr>
+      </p:pic>
     </p:spTree>
     <p:extLst>
       <p:ext uri="{BB962C8B-B14F-4D97-AF65-F5344CB8AC3E}">
@@ -3667,7 +3926,7 @@
 </p:sld>
 </file>
 
-<file path=ppt/slides/slide3.xml><?xml version="1.0" encoding="utf-8"?>
+<file path=ppt/slides/slide4.xml><?xml version="1.0" encoding="utf-8"?>
 <p:sld xmlns:a="http://schemas.openxmlformats.org/drawingml/2006/main" xmlns:r="http://schemas.openxmlformats.org/officeDocument/2006/relationships" xmlns:p="http://schemas.openxmlformats.org/presentationml/2006/main">
   <p:cSld>
     <p:spTree>
@@ -4047,7 +4306,7 @@
 </p:sld>
 </file>
 
-<file path=ppt/slides/slide4.xml><?xml version="1.0" encoding="utf-8"?>
+<file path=ppt/slides/slide5.xml><?xml version="1.0" encoding="utf-8"?>
 <p:sld xmlns:a="http://schemas.openxmlformats.org/drawingml/2006/main" xmlns:r="http://schemas.openxmlformats.org/officeDocument/2006/relationships" xmlns:p="http://schemas.openxmlformats.org/presentationml/2006/main">
   <p:cSld>
     <p:spTree>

--- a/figures/datapaper/scratch_routeyearcombo.pptx
+++ b/figures/datapaper/scratch_routeyearcombo.pptx
@@ -263,7 +263,7 @@
           <a:p>
             <a:fld id="{E3CAC27E-A09F-42ED-BD9F-2DE2B5FBE76A}" type="datetimeFigureOut">
               <a:rPr lang="en-US" smtClean="0"/>
-              <a:t>6/4/2026</a:t>
+              <a:t>6/11/2026</a:t>
             </a:fld>
             <a:endParaRPr lang="en-US"/>
           </a:p>
@@ -461,7 +461,7 @@
           <a:p>
             <a:fld id="{E3CAC27E-A09F-42ED-BD9F-2DE2B5FBE76A}" type="datetimeFigureOut">
               <a:rPr lang="en-US" smtClean="0"/>
-              <a:t>6/4/2026</a:t>
+              <a:t>6/11/2026</a:t>
             </a:fld>
             <a:endParaRPr lang="en-US"/>
           </a:p>
@@ -669,7 +669,7 @@
           <a:p>
             <a:fld id="{E3CAC27E-A09F-42ED-BD9F-2DE2B5FBE76A}" type="datetimeFigureOut">
               <a:rPr lang="en-US" smtClean="0"/>
-              <a:t>6/4/2026</a:t>
+              <a:t>6/11/2026</a:t>
             </a:fld>
             <a:endParaRPr lang="en-US"/>
           </a:p>
@@ -867,7 +867,7 @@
           <a:p>
             <a:fld id="{E3CAC27E-A09F-42ED-BD9F-2DE2B5FBE76A}" type="datetimeFigureOut">
               <a:rPr lang="en-US" smtClean="0"/>
-              <a:t>6/4/2026</a:t>
+              <a:t>6/11/2026</a:t>
             </a:fld>
             <a:endParaRPr lang="en-US"/>
           </a:p>
@@ -1142,7 +1142,7 @@
           <a:p>
             <a:fld id="{E3CAC27E-A09F-42ED-BD9F-2DE2B5FBE76A}" type="datetimeFigureOut">
               <a:rPr lang="en-US" smtClean="0"/>
-              <a:t>6/4/2026</a:t>
+              <a:t>6/11/2026</a:t>
             </a:fld>
             <a:endParaRPr lang="en-US"/>
           </a:p>
@@ -1407,7 +1407,7 @@
           <a:p>
             <a:fld id="{E3CAC27E-A09F-42ED-BD9F-2DE2B5FBE76A}" type="datetimeFigureOut">
               <a:rPr lang="en-US" smtClean="0"/>
-              <a:t>6/4/2026</a:t>
+              <a:t>6/11/2026</a:t>
             </a:fld>
             <a:endParaRPr lang="en-US"/>
           </a:p>
@@ -1819,7 +1819,7 @@
           <a:p>
             <a:fld id="{E3CAC27E-A09F-42ED-BD9F-2DE2B5FBE76A}" type="datetimeFigureOut">
               <a:rPr lang="en-US" smtClean="0"/>
-              <a:t>6/4/2026</a:t>
+              <a:t>6/11/2026</a:t>
             </a:fld>
             <a:endParaRPr lang="en-US"/>
           </a:p>
@@ -1960,7 +1960,7 @@
           <a:p>
             <a:fld id="{E3CAC27E-A09F-42ED-BD9F-2DE2B5FBE76A}" type="datetimeFigureOut">
               <a:rPr lang="en-US" smtClean="0"/>
-              <a:t>6/4/2026</a:t>
+              <a:t>6/11/2026</a:t>
             </a:fld>
             <a:endParaRPr lang="en-US"/>
           </a:p>
@@ -2073,7 +2073,7 @@
           <a:p>
             <a:fld id="{E3CAC27E-A09F-42ED-BD9F-2DE2B5FBE76A}" type="datetimeFigureOut">
               <a:rPr lang="en-US" smtClean="0"/>
-              <a:t>6/4/2026</a:t>
+              <a:t>6/11/2026</a:t>
             </a:fld>
             <a:endParaRPr lang="en-US"/>
           </a:p>
@@ -2384,7 +2384,7 @@
           <a:p>
             <a:fld id="{E3CAC27E-A09F-42ED-BD9F-2DE2B5FBE76A}" type="datetimeFigureOut">
               <a:rPr lang="en-US" smtClean="0"/>
-              <a:t>6/4/2026</a:t>
+              <a:t>6/11/2026</a:t>
             </a:fld>
             <a:endParaRPr lang="en-US"/>
           </a:p>
@@ -2672,7 +2672,7 @@
           <a:p>
             <a:fld id="{E3CAC27E-A09F-42ED-BD9F-2DE2B5FBE76A}" type="datetimeFigureOut">
               <a:rPr lang="en-US" smtClean="0"/>
-              <a:t>6/4/2026</a:t>
+              <a:t>6/11/2026</a:t>
             </a:fld>
             <a:endParaRPr lang="en-US"/>
           </a:p>
@@ -2913,7 +2913,7 @@
           <a:p>
             <a:fld id="{E3CAC27E-A09F-42ED-BD9F-2DE2B5FBE76A}" type="datetimeFigureOut">
               <a:rPr lang="en-US" smtClean="0"/>
-              <a:t>6/4/2026</a:t>
+              <a:t>6/11/2026</a:t>
             </a:fld>
             <a:endParaRPr lang="en-US"/>
           </a:p>
@@ -4834,6 +4834,97 @@
           <a:xfrm>
             <a:off x="7877176" y="2850960"/>
             <a:ext cx="1101360" cy="488010"/>
+          </a:xfrm>
+          <a:prstGeom prst="rect">
+            <a:avLst/>
+          </a:prstGeom>
+        </p:spPr>
+      </p:pic>
+      <p:sp>
+        <p:nvSpPr>
+          <p:cNvPr id="8" name="Rectangle 7">
+            <a:extLst>
+              <a:ext uri="{FF2B5EF4-FFF2-40B4-BE49-F238E27FC236}">
+                <a16:creationId xmlns:a16="http://schemas.microsoft.com/office/drawing/2014/main" id="{A756984A-A17D-C6B2-BE69-AD28667143F6}"/>
+              </a:ext>
+            </a:extLst>
+          </p:cNvPr>
+          <p:cNvSpPr/>
+          <p:nvPr/>
+        </p:nvSpPr>
+        <p:spPr>
+          <a:xfrm>
+            <a:off x="8144741" y="3097158"/>
+            <a:ext cx="774442" cy="118610"/>
+          </a:xfrm>
+          <a:prstGeom prst="rect">
+            <a:avLst/>
+          </a:prstGeom>
+          <a:solidFill>
+            <a:schemeClr val="bg1"/>
+          </a:solidFill>
+          <a:ln>
+            <a:solidFill>
+              <a:schemeClr val="bg1"/>
+            </a:solidFill>
+          </a:ln>
+        </p:spPr>
+        <p:style>
+          <a:lnRef idx="2">
+            <a:schemeClr val="accent1">
+              <a:shade val="15000"/>
+            </a:schemeClr>
+          </a:lnRef>
+          <a:fillRef idx="1">
+            <a:schemeClr val="accent1"/>
+          </a:fillRef>
+          <a:effectRef idx="0">
+            <a:schemeClr val="accent1"/>
+          </a:effectRef>
+          <a:fontRef idx="minor">
+            <a:schemeClr val="lt1"/>
+          </a:fontRef>
+        </p:style>
+        <p:txBody>
+          <a:bodyPr rtlCol="0" anchor="ctr"/>
+          <a:lstStyle/>
+          <a:p>
+            <a:pPr algn="ctr"/>
+            <a:endParaRPr lang="en-US"/>
+          </a:p>
+        </p:txBody>
+      </p:sp>
+      <p:pic>
+        <p:nvPicPr>
+          <p:cNvPr id="3" name="Picture 2">
+            <a:extLst>
+              <a:ext uri="{FF2B5EF4-FFF2-40B4-BE49-F238E27FC236}">
+                <a16:creationId xmlns:a16="http://schemas.microsoft.com/office/drawing/2014/main" id="{64DD74DC-31CD-4C84-AC73-79BE86D88628}"/>
+              </a:ext>
+            </a:extLst>
+          </p:cNvPr>
+          <p:cNvPicPr>
+            <a:picLocks noChangeAspect="1"/>
+          </p:cNvPicPr>
+          <p:nvPr/>
+        </p:nvPicPr>
+        <p:blipFill>
+          <a:blip r:embed="rId5">
+            <a:extLst>
+              <a:ext uri="{28A0092B-C50C-407E-A947-70E740481C1C}">
+                <a14:useLocalDpi xmlns:a14="http://schemas.microsoft.com/office/drawing/2010/main" val="0"/>
+              </a:ext>
+            </a:extLst>
+          </a:blip>
+          <a:srcRect l="48991" t="46292" r="38914" b="49944"/>
+          <a:stretch>
+            <a:fillRect/>
+          </a:stretch>
+        </p:blipFill>
+        <p:spPr>
+          <a:xfrm>
+            <a:off x="8155335" y="3097158"/>
+            <a:ext cx="550903" cy="127652"/>
           </a:xfrm>
           <a:prstGeom prst="rect">
             <a:avLst/>
